--- a/p05/Defining-a-frame-components.pptx
+++ b/p05/Defining-a-frame-components.pptx
@@ -5,7 +5,7 @@
     <p:sldMasterId id="2147483660" r:id="rId1"/>
   </p:sldMasterIdLst>
   <p:notesMasterIdLst>
-    <p:notesMasterId r:id="rId14"/>
+    <p:notesMasterId r:id="rId15"/>
   </p:notesMasterIdLst>
   <p:sldIdLst>
     <p:sldId id="281" r:id="rId2"/>
@@ -18,8 +18,9 @@
     <p:sldId id="277" r:id="rId9"/>
     <p:sldId id="278" r:id="rId10"/>
     <p:sldId id="279" r:id="rId11"/>
-    <p:sldId id="280" r:id="rId12"/>
-    <p:sldId id="293" r:id="rId13"/>
+    <p:sldId id="294" r:id="rId12"/>
+    <p:sldId id="280" r:id="rId13"/>
+    <p:sldId id="293" r:id="rId14"/>
   </p:sldIdLst>
   <p:sldSz cx="12192000" cy="6858000"/>
   <p:notesSz cx="6858000" cy="9144000"/>
@@ -208,7 +209,7 @@
           <a:p>
             <a:fld id="{0CC22E7C-05FA-4B07-9A3E-26967016A603}" type="datetimeFigureOut">
               <a:rPr lang="en-US" smtClean="0"/>
-              <a:t>1/6/2026</a:t>
+              <a:t>5/20/2026</a:t>
             </a:fld>
             <a:endParaRPr lang="en-US"/>
           </a:p>
@@ -475,6 +476,343 @@
 </p:notesMaster>
 </file>
 
+<file path=ppt/notesSlides/notesSlide1.xml><?xml version="1.0" encoding="utf-8"?>
+<p:notes xmlns:a="http://schemas.openxmlformats.org/drawingml/2006/main" xmlns:r="http://schemas.openxmlformats.org/officeDocument/2006/relationships" xmlns:p="http://schemas.openxmlformats.org/presentationml/2006/main">
+  <p:cSld>
+    <p:spTree>
+      <p:nvGrpSpPr>
+        <p:cNvPr id="1" name=""/>
+        <p:cNvGrpSpPr/>
+        <p:nvPr/>
+      </p:nvGrpSpPr>
+      <p:grpSpPr>
+        <a:xfrm>
+          <a:off x="0" y="0"/>
+          <a:ext cx="0" cy="0"/>
+          <a:chOff x="0" y="0"/>
+          <a:chExt cx="0" cy="0"/>
+        </a:xfrm>
+      </p:grpSpPr>
+      <p:sp>
+        <p:nvSpPr>
+          <p:cNvPr id="2" name="Slide Image Placeholder 1"/>
+          <p:cNvSpPr>
+            <a:spLocks noGrp="1" noRot="1" noChangeAspect="1"/>
+          </p:cNvSpPr>
+          <p:nvPr>
+            <p:ph type="sldImg"/>
+          </p:nvPr>
+        </p:nvSpPr>
+        <p:spPr/>
+      </p:sp>
+      <p:sp>
+        <p:nvSpPr>
+          <p:cNvPr id="3" name="Notes Placeholder 2"/>
+          <p:cNvSpPr>
+            <a:spLocks noGrp="1"/>
+          </p:cNvSpPr>
+          <p:nvPr>
+            <p:ph type="body" idx="1"/>
+          </p:nvPr>
+        </p:nvSpPr>
+        <p:spPr/>
+        <p:txBody>
+          <a:bodyPr/>
+          <a:lstStyle/>
+          <a:p>
+            <a:pPr marL="0" indent="0">
+              <a:buNone/>
+            </a:pPr>
+            <a:r>
+              <a:rPr lang="en-US" b="0" u="none" strike="noStrike" dirty="0" err="1">
+                <a:effectLst/>
+                <a:latin typeface="Courier New" panose="02070309020205020404" pitchFamily="49" charset="0"/>
+              </a:rPr>
+              <a:t>AFRAME.registerComponent</a:t>
+            </a:r>
+            <a:r>
+              <a:rPr lang="en-US" b="0" u="none" strike="noStrike" dirty="0">
+                <a:effectLst/>
+                <a:latin typeface="Courier New" panose="02070309020205020404" pitchFamily="49" charset="0"/>
+              </a:rPr>
+              <a:t>('my-component', { </a:t>
+            </a:r>
+          </a:p>
+          <a:p>
+            <a:pPr marL="0" indent="0">
+              <a:buNone/>
+            </a:pPr>
+            <a:r>
+              <a:rPr lang="en-US" dirty="0">
+                <a:latin typeface="Courier New" panose="02070309020205020404" pitchFamily="49" charset="0"/>
+              </a:rPr>
+              <a:t>	</a:t>
+            </a:r>
+            <a:r>
+              <a:rPr lang="en-US" b="0" u="none" strike="noStrike" dirty="0" err="1">
+                <a:effectLst/>
+                <a:latin typeface="Courier New" panose="02070309020205020404" pitchFamily="49" charset="0"/>
+              </a:rPr>
+              <a:t>init</a:t>
+            </a:r>
+            <a:r>
+              <a:rPr lang="en-US" b="0" u="none" strike="noStrike" dirty="0">
+                <a:effectLst/>
+                <a:latin typeface="Courier New" panose="02070309020205020404" pitchFamily="49" charset="0"/>
+              </a:rPr>
+              <a:t>: function () {</a:t>
+            </a:r>
+          </a:p>
+          <a:p>
+            <a:pPr marL="0" indent="0">
+              <a:buNone/>
+            </a:pPr>
+            <a:r>
+              <a:rPr lang="en-US" b="0" u="none" strike="noStrike" dirty="0">
+                <a:effectLst/>
+                <a:latin typeface="Courier New" panose="02070309020205020404" pitchFamily="49" charset="0"/>
+              </a:rPr>
+              <a:t>	// Throttle the tick to run roughly once </a:t>
+            </a:r>
+          </a:p>
+          <a:p>
+            <a:pPr marL="0" indent="0">
+              <a:buNone/>
+            </a:pPr>
+            <a:r>
+              <a:rPr lang="en-US" dirty="0">
+                <a:latin typeface="Courier New" panose="02070309020205020404" pitchFamily="49" charset="0"/>
+              </a:rPr>
+              <a:t>	// every 1000ms </a:t>
+            </a:r>
+            <a:r>
+              <a:rPr lang="en-US" b="0" u="none" strike="noStrike" dirty="0">
+                <a:effectLst/>
+                <a:latin typeface="Courier New" panose="02070309020205020404" pitchFamily="49" charset="0"/>
+              </a:rPr>
+              <a:t>(1 second)</a:t>
+            </a:r>
+          </a:p>
+          <a:p>
+            <a:pPr marL="0" indent="0">
+              <a:buNone/>
+            </a:pPr>
+            <a:r>
+              <a:rPr lang="en-US" b="0" u="none" strike="noStrike" dirty="0">
+                <a:effectLst/>
+                <a:latin typeface="Courier New" panose="02070309020205020404" pitchFamily="49" charset="0"/>
+              </a:rPr>
+              <a:t> </a:t>
+            </a:r>
+          </a:p>
+          <a:p>
+            <a:pPr marL="0" indent="0">
+              <a:buNone/>
+            </a:pPr>
+            <a:r>
+              <a:rPr lang="en-US" dirty="0">
+                <a:latin typeface="Courier New" panose="02070309020205020404" pitchFamily="49" charset="0"/>
+              </a:rPr>
+              <a:t>	</a:t>
+            </a:r>
+            <a:r>
+              <a:rPr lang="en-US" b="1" u="none" strike="noStrike" dirty="0" err="1">
+                <a:solidFill>
+                  <a:srgbClr val="0070C0"/>
+                </a:solidFill>
+                <a:effectLst/>
+                <a:latin typeface="Courier New" panose="02070309020205020404" pitchFamily="49" charset="0"/>
+              </a:rPr>
+              <a:t>this.throttledFunction</a:t>
+            </a:r>
+            <a:r>
+              <a:rPr lang="en-US" b="1" u="none" strike="noStrike" dirty="0">
+                <a:solidFill>
+                  <a:srgbClr val="0070C0"/>
+                </a:solidFill>
+                <a:effectLst/>
+                <a:latin typeface="Courier New" panose="02070309020205020404" pitchFamily="49" charset="0"/>
+              </a:rPr>
+              <a:t> </a:t>
+            </a:r>
+            <a:r>
+              <a:rPr lang="en-US" b="0" u="none" strike="noStrike" dirty="0">
+                <a:effectLst/>
+                <a:latin typeface="Courier New" panose="02070309020205020404" pitchFamily="49" charset="0"/>
+              </a:rPr>
+              <a:t>= 	</a:t>
+            </a:r>
+            <a:r>
+              <a:rPr lang="en-US" b="1" u="none" strike="noStrike" dirty="0" err="1">
+                <a:solidFill>
+                  <a:srgbClr val="0070C0"/>
+                </a:solidFill>
+                <a:effectLst/>
+                <a:latin typeface="Courier New" panose="02070309020205020404" pitchFamily="49" charset="0"/>
+              </a:rPr>
+              <a:t>AFRAME.utils.throttleTick</a:t>
+            </a:r>
+            <a:r>
+              <a:rPr lang="en-US" b="0" u="none" strike="noStrike" dirty="0">
+                <a:effectLst/>
+                <a:latin typeface="Courier New" panose="02070309020205020404" pitchFamily="49" charset="0"/>
+              </a:rPr>
+              <a:t>(</a:t>
+            </a:r>
+            <a:r>
+              <a:rPr lang="en-US" b="0" u="none" strike="noStrike" dirty="0" err="1">
+                <a:effectLst/>
+                <a:latin typeface="Courier New" panose="02070309020205020404" pitchFamily="49" charset="0"/>
+              </a:rPr>
+              <a:t>this.tick</a:t>
+            </a:r>
+            <a:r>
+              <a:rPr lang="en-US" b="0" u="none" strike="noStrike" dirty="0">
+                <a:effectLst/>
+                <a:latin typeface="Courier New" panose="02070309020205020404" pitchFamily="49" charset="0"/>
+              </a:rPr>
+              <a:t>, </a:t>
+            </a:r>
+          </a:p>
+          <a:p>
+            <a:pPr marL="0" indent="0">
+              <a:buNone/>
+            </a:pPr>
+            <a:r>
+              <a:rPr lang="en-US" dirty="0">
+                <a:latin typeface="Courier New" panose="02070309020205020404" pitchFamily="49" charset="0"/>
+              </a:rPr>
+              <a:t>							</a:t>
+            </a:r>
+            <a:r>
+              <a:rPr lang="en-US" b="0" u="none" strike="noStrike" dirty="0">
+                <a:effectLst/>
+                <a:latin typeface="Courier New" panose="02070309020205020404" pitchFamily="49" charset="0"/>
+              </a:rPr>
+              <a:t>1000, this); }, </a:t>
+            </a:r>
+          </a:p>
+          <a:p>
+            <a:pPr marL="0" indent="0">
+              <a:buNone/>
+            </a:pPr>
+            <a:r>
+              <a:rPr lang="en-US" dirty="0">
+                <a:latin typeface="Courier New" panose="02070309020205020404" pitchFamily="49" charset="0"/>
+              </a:rPr>
+              <a:t>	</a:t>
+            </a:r>
+            <a:r>
+              <a:rPr lang="en-US" b="0" u="none" strike="noStrike" dirty="0">
+                <a:effectLst/>
+                <a:latin typeface="Courier New" panose="02070309020205020404" pitchFamily="49" charset="0"/>
+              </a:rPr>
+              <a:t>tick: function (time, </a:t>
+            </a:r>
+            <a:r>
+              <a:rPr lang="en-US" b="0" u="none" strike="noStrike" dirty="0" err="1">
+                <a:effectLst/>
+                <a:latin typeface="Courier New" panose="02070309020205020404" pitchFamily="49" charset="0"/>
+              </a:rPr>
+              <a:t>timeDelta</a:t>
+            </a:r>
+            <a:r>
+              <a:rPr lang="en-US" b="0" u="none" strike="noStrike" dirty="0">
+                <a:effectLst/>
+                <a:latin typeface="Courier New" panose="02070309020205020404" pitchFamily="49" charset="0"/>
+              </a:rPr>
+              <a:t>) {</a:t>
+            </a:r>
+          </a:p>
+          <a:p>
+            <a:pPr marL="0" indent="0">
+              <a:buNone/>
+            </a:pPr>
+            <a:r>
+              <a:rPr lang="en-US" b="0" u="none" strike="noStrike" dirty="0">
+                <a:effectLst/>
+                <a:latin typeface="Courier New" panose="02070309020205020404" pitchFamily="49" charset="0"/>
+              </a:rPr>
+              <a:t>		console.log('Time execution:’, 							</a:t>
+            </a:r>
+            <a:r>
+              <a:rPr lang="en-US" b="0" u="none" strike="noStrike" dirty="0" err="1">
+                <a:effectLst/>
+                <a:latin typeface="Courier New" panose="02070309020205020404" pitchFamily="49" charset="0"/>
+              </a:rPr>
+              <a:t>timeDelta</a:t>
+            </a:r>
+            <a:r>
+              <a:rPr lang="en-US" b="0" u="none" strike="noStrike" dirty="0">
+                <a:effectLst/>
+                <a:latin typeface="Courier New" panose="02070309020205020404" pitchFamily="49" charset="0"/>
+              </a:rPr>
+              <a:t>); </a:t>
+            </a:r>
+          </a:p>
+          <a:p>
+            <a:pPr marL="0" indent="0">
+              <a:buNone/>
+            </a:pPr>
+            <a:r>
+              <a:rPr lang="en-US" b="0" u="none" strike="noStrike" dirty="0">
+                <a:effectLst/>
+                <a:latin typeface="Courier New" panose="02070309020205020404" pitchFamily="49" charset="0"/>
+              </a:rPr>
+              <a:t>	} </a:t>
+            </a:r>
+          </a:p>
+          <a:p>
+            <a:pPr marL="0" indent="0">
+              <a:buNone/>
+            </a:pPr>
+            <a:r>
+              <a:rPr lang="en-US" b="0" u="none" strike="noStrike" dirty="0">
+                <a:effectLst/>
+                <a:latin typeface="Courier New" panose="02070309020205020404" pitchFamily="49" charset="0"/>
+              </a:rPr>
+              <a:t>});</a:t>
+            </a:r>
+            <a:endParaRPr lang="en-US" dirty="0"/>
+          </a:p>
+        </p:txBody>
+      </p:sp>
+      <p:sp>
+        <p:nvSpPr>
+          <p:cNvPr id="4" name="Slide Number Placeholder 3"/>
+          <p:cNvSpPr>
+            <a:spLocks noGrp="1"/>
+          </p:cNvSpPr>
+          <p:nvPr>
+            <p:ph type="sldNum" sz="quarter" idx="5"/>
+          </p:nvPr>
+        </p:nvSpPr>
+        <p:spPr/>
+        <p:txBody>
+          <a:bodyPr/>
+          <a:lstStyle/>
+          <a:p>
+            <a:fld id="{A5D85EB0-CA0C-4149-A730-6931A131D092}" type="slidenum">
+              <a:rPr lang="en-US" smtClean="0"/>
+              <a:t>11</a:t>
+            </a:fld>
+            <a:endParaRPr lang="en-US"/>
+          </a:p>
+        </p:txBody>
+      </p:sp>
+    </p:spTree>
+    <p:extLst>
+      <p:ext uri="{BB962C8B-B14F-4D97-AF65-F5344CB8AC3E}">
+        <p14:creationId xmlns:p14="http://schemas.microsoft.com/office/powerpoint/2010/main" val="4207804928"/>
+      </p:ext>
+    </p:extLst>
+  </p:cSld>
+  <p:clrMapOvr>
+    <a:masterClrMapping/>
+  </p:clrMapOvr>
+</p:notes>
+</file>
+
 <file path=ppt/slideLayouts/slideLayout1.xml><?xml version="1.0" encoding="utf-8"?>
 <p:sldLayout xmlns:a="http://schemas.openxmlformats.org/drawingml/2006/main" xmlns:r="http://schemas.openxmlformats.org/officeDocument/2006/relationships" xmlns:p="http://schemas.openxmlformats.org/presentationml/2006/main" type="title" preserve="1">
   <p:cSld name="Title Slide">
@@ -606,7 +944,7 @@
           <a:p>
             <a:fld id="{846CE7D5-CF57-46EF-B807-FDD0502418D4}" type="datetimeFigureOut">
               <a:rPr lang="en-US" smtClean="0"/>
-              <a:t>1/6/2026</a:t>
+              <a:t>5/20/2026</a:t>
             </a:fld>
             <a:endParaRPr lang="en-US"/>
           </a:p>
@@ -776,7 +1114,7 @@
           <a:p>
             <a:fld id="{846CE7D5-CF57-46EF-B807-FDD0502418D4}" type="datetimeFigureOut">
               <a:rPr lang="en-US" smtClean="0"/>
-              <a:t>1/6/2026</a:t>
+              <a:t>5/20/2026</a:t>
             </a:fld>
             <a:endParaRPr lang="en-US"/>
           </a:p>
@@ -956,7 +1294,7 @@
           <a:p>
             <a:fld id="{846CE7D5-CF57-46EF-B807-FDD0502418D4}" type="datetimeFigureOut">
               <a:rPr lang="en-US" smtClean="0"/>
-              <a:t>1/6/2026</a:t>
+              <a:t>5/20/2026</a:t>
             </a:fld>
             <a:endParaRPr lang="en-US"/>
           </a:p>
@@ -1126,7 +1464,7 @@
           <a:p>
             <a:fld id="{846CE7D5-CF57-46EF-B807-FDD0502418D4}" type="datetimeFigureOut">
               <a:rPr lang="en-US" smtClean="0"/>
-              <a:t>1/6/2026</a:t>
+              <a:t>5/20/2026</a:t>
             </a:fld>
             <a:endParaRPr lang="en-US"/>
           </a:p>
@@ -1372,7 +1710,7 @@
           <a:p>
             <a:fld id="{846CE7D5-CF57-46EF-B807-FDD0502418D4}" type="datetimeFigureOut">
               <a:rPr lang="en-US" smtClean="0"/>
-              <a:t>1/6/2026</a:t>
+              <a:t>5/20/2026</a:t>
             </a:fld>
             <a:endParaRPr lang="en-US"/>
           </a:p>
@@ -1604,7 +1942,7 @@
           <a:p>
             <a:fld id="{846CE7D5-CF57-46EF-B807-FDD0502418D4}" type="datetimeFigureOut">
               <a:rPr lang="en-US" smtClean="0"/>
-              <a:t>1/6/2026</a:t>
+              <a:t>5/20/2026</a:t>
             </a:fld>
             <a:endParaRPr lang="en-US"/>
           </a:p>
@@ -1971,7 +2309,7 @@
           <a:p>
             <a:fld id="{846CE7D5-CF57-46EF-B807-FDD0502418D4}" type="datetimeFigureOut">
               <a:rPr lang="en-US" smtClean="0"/>
-              <a:t>1/6/2026</a:t>
+              <a:t>5/20/2026</a:t>
             </a:fld>
             <a:endParaRPr lang="en-US"/>
           </a:p>
@@ -2089,7 +2427,7 @@
           <a:p>
             <a:fld id="{846CE7D5-CF57-46EF-B807-FDD0502418D4}" type="datetimeFigureOut">
               <a:rPr lang="en-US" smtClean="0"/>
-              <a:t>1/6/2026</a:t>
+              <a:t>5/20/2026</a:t>
             </a:fld>
             <a:endParaRPr lang="en-US"/>
           </a:p>
@@ -2184,7 +2522,7 @@
           <a:p>
             <a:fld id="{846CE7D5-CF57-46EF-B807-FDD0502418D4}" type="datetimeFigureOut">
               <a:rPr lang="en-US" smtClean="0"/>
-              <a:t>1/6/2026</a:t>
+              <a:t>5/20/2026</a:t>
             </a:fld>
             <a:endParaRPr lang="en-US"/>
           </a:p>
@@ -2461,7 +2799,7 @@
           <a:p>
             <a:fld id="{846CE7D5-CF57-46EF-B807-FDD0502418D4}" type="datetimeFigureOut">
               <a:rPr lang="en-US" smtClean="0"/>
-              <a:t>1/6/2026</a:t>
+              <a:t>5/20/2026</a:t>
             </a:fld>
             <a:endParaRPr lang="en-US"/>
           </a:p>
@@ -2718,7 +3056,7 @@
           <a:p>
             <a:fld id="{846CE7D5-CF57-46EF-B807-FDD0502418D4}" type="datetimeFigureOut">
               <a:rPr lang="en-US" smtClean="0"/>
-              <a:t>1/6/2026</a:t>
+              <a:t>5/20/2026</a:t>
             </a:fld>
             <a:endParaRPr lang="en-US"/>
           </a:p>
@@ -2931,7 +3269,7 @@
           <a:p>
             <a:fld id="{846CE7D5-CF57-46EF-B807-FDD0502418D4}" type="datetimeFigureOut">
               <a:rPr lang="en-US" smtClean="0"/>
-              <a:t>1/6/2026</a:t>
+              <a:t>5/20/2026</a:t>
             </a:fld>
             <a:endParaRPr lang="en-US"/>
           </a:p>
@@ -4693,7 +5031,15 @@
             </a:r>
             <a:r>
               <a:rPr lang="en-US" dirty="0"/>
-              <a:t>('my-color-toggle', {</a:t>
+              <a:t>('</a:t>
+            </a:r>
+            <a:r>
+              <a:rPr lang="en-US" b="1" dirty="0"/>
+              <a:t>my-color-toggle</a:t>
+            </a:r>
+            <a:r>
+              <a:rPr lang="en-US" dirty="0"/>
+              <a:t>', {</a:t>
             </a:r>
           </a:p>
           <a:p>
@@ -4834,6 +5180,340 @@
       </p:grpSpPr>
       <p:sp>
         <p:nvSpPr>
+          <p:cNvPr id="3" name="Content Placeholder 2">
+            <a:extLst>
+              <a:ext uri="{FF2B5EF4-FFF2-40B4-BE49-F238E27FC236}">
+                <a16:creationId xmlns:a16="http://schemas.microsoft.com/office/drawing/2014/main" id="{B513774E-A0E3-807C-D00C-184DE1040254}"/>
+              </a:ext>
+            </a:extLst>
+          </p:cNvPr>
+          <p:cNvSpPr>
+            <a:spLocks noGrp="1"/>
+          </p:cNvSpPr>
+          <p:nvPr>
+            <p:ph idx="1"/>
+          </p:nvPr>
+        </p:nvSpPr>
+        <p:spPr>
+          <a:xfrm>
+            <a:off x="838200" y="342900"/>
+            <a:ext cx="10515600" cy="5834063"/>
+          </a:xfrm>
+        </p:spPr>
+        <p:txBody>
+          <a:bodyPr>
+            <a:normAutofit fontScale="92500" lnSpcReduction="20000"/>
+          </a:bodyPr>
+          <a:lstStyle/>
+          <a:p>
+            <a:pPr marL="0" indent="0">
+              <a:buNone/>
+            </a:pPr>
+            <a:r>
+              <a:rPr lang="en-US" b="0" u="none" strike="noStrike" dirty="0" err="1">
+                <a:effectLst/>
+                <a:latin typeface="Courier New" panose="02070309020205020404" pitchFamily="49" charset="0"/>
+              </a:rPr>
+              <a:t>AFRAME.registerComponent</a:t>
+            </a:r>
+            <a:r>
+              <a:rPr lang="en-US" b="0" u="none" strike="noStrike" dirty="0">
+                <a:effectLst/>
+                <a:latin typeface="Courier New" panose="02070309020205020404" pitchFamily="49" charset="0"/>
+              </a:rPr>
+              <a:t>('my-component', { </a:t>
+            </a:r>
+          </a:p>
+          <a:p>
+            <a:pPr marL="0" indent="0">
+              <a:buNone/>
+            </a:pPr>
+            <a:r>
+              <a:rPr lang="en-US" dirty="0">
+                <a:latin typeface="Courier New" panose="02070309020205020404" pitchFamily="49" charset="0"/>
+              </a:rPr>
+              <a:t>	</a:t>
+            </a:r>
+            <a:r>
+              <a:rPr lang="en-US" b="1" u="none" strike="noStrike" dirty="0" err="1">
+                <a:effectLst/>
+                <a:latin typeface="Courier New" panose="02070309020205020404" pitchFamily="49" charset="0"/>
+              </a:rPr>
+              <a:t>init</a:t>
+            </a:r>
+            <a:r>
+              <a:rPr lang="en-US" b="0" u="none" strike="noStrike" dirty="0">
+                <a:effectLst/>
+                <a:latin typeface="Courier New" panose="02070309020205020404" pitchFamily="49" charset="0"/>
+              </a:rPr>
+              <a:t>: function () {</a:t>
+            </a:r>
+          </a:p>
+          <a:p>
+            <a:pPr marL="0" indent="0">
+              <a:buNone/>
+            </a:pPr>
+            <a:r>
+              <a:rPr lang="en-US" b="0" u="none" strike="noStrike" dirty="0">
+                <a:effectLst/>
+                <a:latin typeface="Courier New" panose="02070309020205020404" pitchFamily="49" charset="0"/>
+              </a:rPr>
+              <a:t>	// Throttle the tick to run roughly once </a:t>
+            </a:r>
+          </a:p>
+          <a:p>
+            <a:pPr marL="0" indent="0">
+              <a:buNone/>
+            </a:pPr>
+            <a:r>
+              <a:rPr lang="en-US" dirty="0">
+                <a:latin typeface="Courier New" panose="02070309020205020404" pitchFamily="49" charset="0"/>
+              </a:rPr>
+              <a:t>	// every 1000ms </a:t>
+            </a:r>
+            <a:r>
+              <a:rPr lang="en-US" b="0" u="none" strike="noStrike" dirty="0">
+                <a:effectLst/>
+                <a:latin typeface="Courier New" panose="02070309020205020404" pitchFamily="49" charset="0"/>
+              </a:rPr>
+              <a:t>(1 second)</a:t>
+            </a:r>
+          </a:p>
+          <a:p>
+            <a:pPr marL="0" indent="0">
+              <a:buNone/>
+            </a:pPr>
+            <a:r>
+              <a:rPr lang="en-US" b="0" u="none" strike="noStrike" dirty="0">
+                <a:effectLst/>
+                <a:latin typeface="Courier New" panose="02070309020205020404" pitchFamily="49" charset="0"/>
+              </a:rPr>
+              <a:t> </a:t>
+            </a:r>
+          </a:p>
+          <a:p>
+            <a:pPr marL="0" indent="0">
+              <a:buNone/>
+            </a:pPr>
+            <a:r>
+              <a:rPr lang="en-US" dirty="0">
+                <a:latin typeface="Courier New" panose="02070309020205020404" pitchFamily="49" charset="0"/>
+              </a:rPr>
+              <a:t>	</a:t>
+            </a:r>
+            <a:r>
+              <a:rPr lang="en-US" b="1" u="none" strike="noStrike" dirty="0" err="1">
+                <a:solidFill>
+                  <a:srgbClr val="0070C0"/>
+                </a:solidFill>
+                <a:effectLst/>
+                <a:latin typeface="Courier New" panose="02070309020205020404" pitchFamily="49" charset="0"/>
+              </a:rPr>
+              <a:t>this.throttledFunction</a:t>
+            </a:r>
+            <a:r>
+              <a:rPr lang="en-US" b="1" u="none" strike="noStrike" dirty="0">
+                <a:solidFill>
+                  <a:srgbClr val="0070C0"/>
+                </a:solidFill>
+                <a:effectLst/>
+                <a:latin typeface="Courier New" panose="02070309020205020404" pitchFamily="49" charset="0"/>
+              </a:rPr>
+              <a:t> </a:t>
+            </a:r>
+            <a:r>
+              <a:rPr lang="en-US" b="0" u="none" strike="noStrike" dirty="0">
+                <a:effectLst/>
+                <a:latin typeface="Courier New" panose="02070309020205020404" pitchFamily="49" charset="0"/>
+              </a:rPr>
+              <a:t>= 	</a:t>
+            </a:r>
+            <a:r>
+              <a:rPr lang="en-US" b="1" u="none" strike="noStrike" dirty="0" err="1">
+                <a:solidFill>
+                  <a:srgbClr val="0070C0"/>
+                </a:solidFill>
+                <a:effectLst/>
+                <a:latin typeface="Courier New" panose="02070309020205020404" pitchFamily="49" charset="0"/>
+              </a:rPr>
+              <a:t>AFRAME.utils.throttleTick</a:t>
+            </a:r>
+            <a:r>
+              <a:rPr lang="en-US" b="0" u="none" strike="noStrike" dirty="0">
+                <a:effectLst/>
+                <a:latin typeface="Courier New" panose="02070309020205020404" pitchFamily="49" charset="0"/>
+              </a:rPr>
+              <a:t>(</a:t>
+            </a:r>
+            <a:r>
+              <a:rPr lang="en-US" b="0" u="none" strike="noStrike" dirty="0" err="1">
+                <a:effectLst/>
+                <a:latin typeface="Courier New" panose="02070309020205020404" pitchFamily="49" charset="0"/>
+              </a:rPr>
+              <a:t>this.tick</a:t>
+            </a:r>
+            <a:r>
+              <a:rPr lang="en-US" b="0" u="none" strike="noStrike" dirty="0">
+                <a:effectLst/>
+                <a:latin typeface="Courier New" panose="02070309020205020404" pitchFamily="49" charset="0"/>
+              </a:rPr>
+              <a:t>, </a:t>
+            </a:r>
+          </a:p>
+          <a:p>
+            <a:pPr marL="0" indent="0">
+              <a:buNone/>
+            </a:pPr>
+            <a:r>
+              <a:rPr lang="en-US" dirty="0">
+                <a:latin typeface="Courier New" panose="02070309020205020404" pitchFamily="49" charset="0"/>
+              </a:rPr>
+              <a:t>							</a:t>
+            </a:r>
+            <a:r>
+              <a:rPr lang="en-US" b="0" u="none" strike="noStrike" dirty="0">
+                <a:effectLst/>
+                <a:latin typeface="Courier New" panose="02070309020205020404" pitchFamily="49" charset="0"/>
+              </a:rPr>
+              <a:t>1000, this); </a:t>
+            </a:r>
+          </a:p>
+          <a:p>
+            <a:pPr marL="0" indent="0">
+              <a:buNone/>
+            </a:pPr>
+            <a:r>
+              <a:rPr lang="en-US" b="0" u="none" strike="noStrike" dirty="0">
+                <a:effectLst/>
+                <a:latin typeface="Courier New" panose="02070309020205020404" pitchFamily="49" charset="0"/>
+              </a:rPr>
+              <a:t>	}, </a:t>
+            </a:r>
+          </a:p>
+          <a:p>
+            <a:pPr marL="0" indent="0">
+              <a:buNone/>
+            </a:pPr>
+            <a:r>
+              <a:rPr lang="en-US" dirty="0">
+                <a:latin typeface="Courier New" panose="02070309020205020404" pitchFamily="49" charset="0"/>
+              </a:rPr>
+              <a:t>	</a:t>
+            </a:r>
+            <a:r>
+              <a:rPr lang="en-US" b="1" u="none" strike="noStrike" dirty="0">
+                <a:effectLst/>
+                <a:latin typeface="Courier New" panose="02070309020205020404" pitchFamily="49" charset="0"/>
+              </a:rPr>
+              <a:t>tick</a:t>
+            </a:r>
+            <a:r>
+              <a:rPr lang="en-US" b="0" u="none" strike="noStrike" dirty="0">
+                <a:effectLst/>
+                <a:latin typeface="Courier New" panose="02070309020205020404" pitchFamily="49" charset="0"/>
+              </a:rPr>
+              <a:t>: function (time, </a:t>
+            </a:r>
+            <a:r>
+              <a:rPr lang="en-US" b="0" u="none" strike="noStrike" dirty="0" err="1">
+                <a:effectLst/>
+                <a:latin typeface="Courier New" panose="02070309020205020404" pitchFamily="49" charset="0"/>
+              </a:rPr>
+              <a:t>timeDelta</a:t>
+            </a:r>
+            <a:r>
+              <a:rPr lang="en-US" b="0" u="none" strike="noStrike" dirty="0">
+                <a:effectLst/>
+                <a:latin typeface="Courier New" panose="02070309020205020404" pitchFamily="49" charset="0"/>
+              </a:rPr>
+              <a:t>) {</a:t>
+            </a:r>
+          </a:p>
+          <a:p>
+            <a:pPr marL="0" indent="0">
+              <a:buNone/>
+            </a:pPr>
+            <a:r>
+              <a:rPr lang="en-US" b="0" u="none" strike="noStrike" dirty="0">
+                <a:effectLst/>
+                <a:latin typeface="Courier New" panose="02070309020205020404" pitchFamily="49" charset="0"/>
+              </a:rPr>
+              <a:t>		console.log('Time execution:’, 							</a:t>
+            </a:r>
+            <a:r>
+              <a:rPr lang="en-US" b="0" u="none" strike="noStrike" dirty="0" err="1">
+                <a:effectLst/>
+                <a:latin typeface="Courier New" panose="02070309020205020404" pitchFamily="49" charset="0"/>
+              </a:rPr>
+              <a:t>timeDelta</a:t>
+            </a:r>
+            <a:r>
+              <a:rPr lang="en-US" b="0" u="none" strike="noStrike" dirty="0">
+                <a:effectLst/>
+                <a:latin typeface="Courier New" panose="02070309020205020404" pitchFamily="49" charset="0"/>
+              </a:rPr>
+              <a:t>); </a:t>
+            </a:r>
+          </a:p>
+          <a:p>
+            <a:pPr marL="0" indent="0">
+              <a:buNone/>
+            </a:pPr>
+            <a:r>
+              <a:rPr lang="en-US" b="0" u="none" strike="noStrike" dirty="0">
+                <a:effectLst/>
+                <a:latin typeface="Courier New" panose="02070309020205020404" pitchFamily="49" charset="0"/>
+              </a:rPr>
+              <a:t>	} </a:t>
+            </a:r>
+          </a:p>
+          <a:p>
+            <a:pPr marL="0" indent="0">
+              <a:buNone/>
+            </a:pPr>
+            <a:r>
+              <a:rPr lang="en-US" b="0" u="none" strike="noStrike" dirty="0">
+                <a:effectLst/>
+                <a:latin typeface="Courier New" panose="02070309020205020404" pitchFamily="49" charset="0"/>
+              </a:rPr>
+              <a:t>});</a:t>
+            </a:r>
+            <a:endParaRPr lang="en-US" dirty="0"/>
+          </a:p>
+        </p:txBody>
+      </p:sp>
+    </p:spTree>
+    <p:extLst>
+      <p:ext uri="{BB962C8B-B14F-4D97-AF65-F5344CB8AC3E}">
+        <p14:creationId xmlns:p14="http://schemas.microsoft.com/office/powerpoint/2010/main" val="1087645713"/>
+      </p:ext>
+    </p:extLst>
+  </p:cSld>
+  <p:clrMapOvr>
+    <a:masterClrMapping/>
+  </p:clrMapOvr>
+</p:sld>
+</file>
+
+<file path=ppt/slides/slide12.xml><?xml version="1.0" encoding="utf-8"?>
+<p:sld xmlns:a="http://schemas.openxmlformats.org/drawingml/2006/main" xmlns:r="http://schemas.openxmlformats.org/officeDocument/2006/relationships" xmlns:p="http://schemas.openxmlformats.org/presentationml/2006/main">
+  <p:cSld>
+    <p:spTree>
+      <p:nvGrpSpPr>
+        <p:cNvPr id="1" name=""/>
+        <p:cNvGrpSpPr/>
+        <p:nvPr/>
+      </p:nvGrpSpPr>
+      <p:grpSpPr>
+        <a:xfrm>
+          <a:off x="0" y="0"/>
+          <a:ext cx="0" cy="0"/>
+          <a:chOff x="0" y="0"/>
+          <a:chExt cx="0" cy="0"/>
+        </a:xfrm>
+      </p:grpSpPr>
+      <p:sp>
+        <p:nvSpPr>
           <p:cNvPr id="2" name="Title 1">
             <a:extLst>
               <a:ext uri="{FF2B5EF4-FFF2-40B4-BE49-F238E27FC236}">
@@ -4913,7 +5593,7 @@
 </p:sld>
 </file>
 
-<file path=ppt/slides/slide12.xml><?xml version="1.0" encoding="utf-8"?>
+<file path=ppt/slides/slide13.xml><?xml version="1.0" encoding="utf-8"?>
 <p:sld xmlns:a="http://schemas.openxmlformats.org/drawingml/2006/main" xmlns:r="http://schemas.openxmlformats.org/officeDocument/2006/relationships" xmlns:p="http://schemas.openxmlformats.org/presentationml/2006/main">
   <p:cSld>
     <p:spTree>
@@ -5535,7 +6215,15 @@
             </a:r>
             <a:r>
               <a:rPr lang="en-US" dirty="0"/>
-              <a:t>(‘my-comp-test', {</a:t>
+              <a:t>(‘</a:t>
+            </a:r>
+            <a:r>
+              <a:rPr lang="en-US" b="1" dirty="0"/>
+              <a:t>my-comp-test</a:t>
+            </a:r>
+            <a:r>
+              <a:rPr lang="en-US" dirty="0"/>
+              <a:t>', {</a:t>
             </a:r>
           </a:p>
           <a:p>
@@ -5706,7 +6394,7 @@
         </p:nvSpPr>
         <p:spPr>
           <a:xfrm>
-            <a:off x="6281529" y="2941983"/>
+            <a:off x="6942481" y="2932085"/>
             <a:ext cx="4542183" cy="2380421"/>
           </a:xfrm>
           <a:prstGeom prst="rect">
@@ -5851,20 +6539,12 @@
               <a:t>AFRAME.registerComponent</a:t>
             </a:r>
             <a:r>
-              <a:rPr lang="en-US" b="1">
+              <a:rPr lang="en-US" b="1" dirty="0">
                 <a:solidFill>
                   <a:srgbClr val="0070C0"/>
                 </a:solidFill>
               </a:rPr>
               <a:t> (</a:t>
-            </a:r>
-            <a:r>
-              <a:rPr lang="en-US" b="1">
-                <a:solidFill>
-                  <a:srgbClr val="FF0000"/>
-                </a:solidFill>
-              </a:rPr>
-              <a:t>Not </a:t>
             </a:r>
             <a:r>
               <a:rPr lang="en-US" b="1" dirty="0">
@@ -5872,7 +6552,7 @@
                   <a:srgbClr val="FF0000"/>
                 </a:solidFill>
               </a:rPr>
-              <a:t>in </a:t>
+              <a:t>Not in </a:t>
             </a:r>
             <a:r>
               <a:rPr lang="en-US" b="1" dirty="0" err="1">
@@ -6236,6 +6916,55 @@
             <a:r>
               <a:rPr lang="en-US"/>
               <a:t>component.html</a:t>
+            </a:r>
+          </a:p>
+        </p:txBody>
+      </p:sp>
+      <p:sp>
+        <p:nvSpPr>
+          <p:cNvPr id="5" name="Arrow: Left 4">
+            <a:extLst>
+              <a:ext uri="{FF2B5EF4-FFF2-40B4-BE49-F238E27FC236}">
+                <a16:creationId xmlns:a16="http://schemas.microsoft.com/office/drawing/2014/main" id="{C7978D84-5CC4-BB59-E3C0-212F54537333}"/>
+              </a:ext>
+            </a:extLst>
+          </p:cNvPr>
+          <p:cNvSpPr/>
+          <p:nvPr/>
+        </p:nvSpPr>
+        <p:spPr>
+          <a:xfrm>
+            <a:off x="3697357" y="3737113"/>
+            <a:ext cx="2559326" cy="819978"/>
+          </a:xfrm>
+          <a:prstGeom prst="leftArrow">
+            <a:avLst/>
+          </a:prstGeom>
+        </p:spPr>
+        <p:style>
+          <a:lnRef idx="2">
+            <a:schemeClr val="dk1">
+              <a:shade val="15000"/>
+            </a:schemeClr>
+          </a:lnRef>
+          <a:fillRef idx="1">
+            <a:schemeClr val="dk1"/>
+          </a:fillRef>
+          <a:effectRef idx="0">
+            <a:schemeClr val="dk1"/>
+          </a:effectRef>
+          <a:fontRef idx="minor">
+            <a:schemeClr val="lt1"/>
+          </a:fontRef>
+        </p:style>
+        <p:txBody>
+          <a:bodyPr rtlCol="0" anchor="ctr"/>
+          <a:lstStyle/>
+          <a:p>
+            <a:pPr algn="ctr"/>
+            <a:r>
+              <a:rPr lang="en-US" dirty="0"/>
+              <a:t>Ever frame update</a:t>
             </a:r>
           </a:p>
         </p:txBody>
@@ -6458,7 +7187,7 @@
                 <a:effectLst/>
                 <a:latin typeface="Söhne"/>
               </a:rPr>
-              <a:t>: Called on every render loop or "frame" of the scene </a:t>
+              <a:t>: Called on every render loop or "frame update" of the scene </a:t>
             </a:r>
           </a:p>
           <a:p>

--- a/p05/Defining-a-frame-components.pptx
+++ b/p05/Defining-a-frame-components.pptx
@@ -5929,7 +5929,7 @@
                 <a:latin typeface="Consolas"/>
                 <a:cs typeface="Calibri" panose="020F0502020204030204"/>
               </a:rPr>
-              <a:t>(‘my-box', {</a:t>
+              <a:t>('my-box', {</a:t>
             </a:r>
             <a:br>
               <a:rPr lang="en-US" dirty="0">

--- a/p05/Defining-a-frame-components.pptx
+++ b/p05/Defining-a-frame-components.pptx
@@ -209,7 +209,7 @@
           <a:p>
             <a:fld id="{0CC22E7C-05FA-4B07-9A3E-26967016A603}" type="datetimeFigureOut">
               <a:rPr lang="en-US" smtClean="0"/>
-              <a:t>5/20/2026</a:t>
+              <a:t>7/9/2026</a:t>
             </a:fld>
             <a:endParaRPr lang="en-US"/>
           </a:p>
@@ -944,7 +944,7 @@
           <a:p>
             <a:fld id="{846CE7D5-CF57-46EF-B807-FDD0502418D4}" type="datetimeFigureOut">
               <a:rPr lang="en-US" smtClean="0"/>
-              <a:t>5/20/2026</a:t>
+              <a:t>7/9/2026</a:t>
             </a:fld>
             <a:endParaRPr lang="en-US"/>
           </a:p>
@@ -1114,7 +1114,7 @@
           <a:p>
             <a:fld id="{846CE7D5-CF57-46EF-B807-FDD0502418D4}" type="datetimeFigureOut">
               <a:rPr lang="en-US" smtClean="0"/>
-              <a:t>5/20/2026</a:t>
+              <a:t>7/9/2026</a:t>
             </a:fld>
             <a:endParaRPr lang="en-US"/>
           </a:p>
@@ -1294,7 +1294,7 @@
           <a:p>
             <a:fld id="{846CE7D5-CF57-46EF-B807-FDD0502418D4}" type="datetimeFigureOut">
               <a:rPr lang="en-US" smtClean="0"/>
-              <a:t>5/20/2026</a:t>
+              <a:t>7/9/2026</a:t>
             </a:fld>
             <a:endParaRPr lang="en-US"/>
           </a:p>
@@ -1464,7 +1464,7 @@
           <a:p>
             <a:fld id="{846CE7D5-CF57-46EF-B807-FDD0502418D4}" type="datetimeFigureOut">
               <a:rPr lang="en-US" smtClean="0"/>
-              <a:t>5/20/2026</a:t>
+              <a:t>7/9/2026</a:t>
             </a:fld>
             <a:endParaRPr lang="en-US"/>
           </a:p>
@@ -1710,7 +1710,7 @@
           <a:p>
             <a:fld id="{846CE7D5-CF57-46EF-B807-FDD0502418D4}" type="datetimeFigureOut">
               <a:rPr lang="en-US" smtClean="0"/>
-              <a:t>5/20/2026</a:t>
+              <a:t>7/9/2026</a:t>
             </a:fld>
             <a:endParaRPr lang="en-US"/>
           </a:p>
@@ -1942,7 +1942,7 @@
           <a:p>
             <a:fld id="{846CE7D5-CF57-46EF-B807-FDD0502418D4}" type="datetimeFigureOut">
               <a:rPr lang="en-US" smtClean="0"/>
-              <a:t>5/20/2026</a:t>
+              <a:t>7/9/2026</a:t>
             </a:fld>
             <a:endParaRPr lang="en-US"/>
           </a:p>
@@ -2309,7 +2309,7 @@
           <a:p>
             <a:fld id="{846CE7D5-CF57-46EF-B807-FDD0502418D4}" type="datetimeFigureOut">
               <a:rPr lang="en-US" smtClean="0"/>
-              <a:t>5/20/2026</a:t>
+              <a:t>7/9/2026</a:t>
             </a:fld>
             <a:endParaRPr lang="en-US"/>
           </a:p>
@@ -2427,7 +2427,7 @@
           <a:p>
             <a:fld id="{846CE7D5-CF57-46EF-B807-FDD0502418D4}" type="datetimeFigureOut">
               <a:rPr lang="en-US" smtClean="0"/>
-              <a:t>5/20/2026</a:t>
+              <a:t>7/9/2026</a:t>
             </a:fld>
             <a:endParaRPr lang="en-US"/>
           </a:p>
@@ -2522,7 +2522,7 @@
           <a:p>
             <a:fld id="{846CE7D5-CF57-46EF-B807-FDD0502418D4}" type="datetimeFigureOut">
               <a:rPr lang="en-US" smtClean="0"/>
-              <a:t>5/20/2026</a:t>
+              <a:t>7/9/2026</a:t>
             </a:fld>
             <a:endParaRPr lang="en-US"/>
           </a:p>
@@ -2799,7 +2799,7 @@
           <a:p>
             <a:fld id="{846CE7D5-CF57-46EF-B807-FDD0502418D4}" type="datetimeFigureOut">
               <a:rPr lang="en-US" smtClean="0"/>
-              <a:t>5/20/2026</a:t>
+              <a:t>7/9/2026</a:t>
             </a:fld>
             <a:endParaRPr lang="en-US"/>
           </a:p>
@@ -3056,7 +3056,7 @@
           <a:p>
             <a:fld id="{846CE7D5-CF57-46EF-B807-FDD0502418D4}" type="datetimeFigureOut">
               <a:rPr lang="en-US" smtClean="0"/>
-              <a:t>5/20/2026</a:t>
+              <a:t>7/9/2026</a:t>
             </a:fld>
             <a:endParaRPr lang="en-US"/>
           </a:p>
@@ -3269,7 +3269,7 @@
           <a:p>
             <a:fld id="{846CE7D5-CF57-46EF-B807-FDD0502418D4}" type="datetimeFigureOut">
               <a:rPr lang="en-US" smtClean="0"/>
-              <a:t>5/20/2026</a:t>
+              <a:t>7/9/2026</a:t>
             </a:fld>
             <a:endParaRPr lang="en-US"/>
           </a:p>
@@ -7083,7 +7083,7 @@
                 <a:effectLst/>
                 <a:latin typeface="Söhne"/>
               </a:rPr>
-              <a:t>: a unique name</a:t>
+              <a:t>: a unique name with a hyphen in it</a:t>
             </a:r>
           </a:p>
           <a:p>
